--- a/Documents/SDU/fagråd/plakater/pptx/genforsamPlakat [Automatisk lagret].pptx
+++ b/Documents/SDU/fagråd/plakater/pptx/genforsamPlakat [Automatisk lagret].pptx
@@ -3818,6 +3818,60 @@
           </a:prstGeom>
         </p:spPr>
       </p:pic>
+      <p:sp>
+        <p:nvSpPr>
+          <p:cNvPr id="17" name="10-takket stjerne 16">
+            <a:extLst>
+              <a:ext uri="{FF2B5EF4-FFF2-40B4-BE49-F238E27FC236}">
+                <a16:creationId xmlns:a16="http://schemas.microsoft.com/office/drawing/2014/main" id="{C5F5CE04-FD51-74DE-0776-F9E7A389546E}"/>
+              </a:ext>
+            </a:extLst>
+          </p:cNvPr>
+          <p:cNvSpPr/>
+          <p:nvPr/>
+        </p:nvSpPr>
+        <p:spPr>
+          <a:xfrm>
+            <a:off x="1452010" y="14194501"/>
+            <a:ext cx="3825952" cy="3825952"/>
+          </a:xfrm>
+          <a:prstGeom prst="star10">
+            <a:avLst/>
+          </a:prstGeom>
+          <a:solidFill>
+            <a:schemeClr val="accent2"/>
+          </a:solidFill>
+          <a:ln w="57150">
+            <a:solidFill>
+              <a:srgbClr val="FFC000"/>
+            </a:solidFill>
+          </a:ln>
+        </p:spPr>
+        <p:style>
+          <a:lnRef idx="2">
+            <a:schemeClr val="accent1">
+              <a:shade val="15000"/>
+            </a:schemeClr>
+          </a:lnRef>
+          <a:fillRef idx="1">
+            <a:schemeClr val="accent1"/>
+          </a:fillRef>
+          <a:effectRef idx="0">
+            <a:schemeClr val="accent1"/>
+          </a:effectRef>
+          <a:fontRef idx="minor">
+            <a:schemeClr val="lt1"/>
+          </a:fontRef>
+        </p:style>
+        <p:txBody>
+          <a:bodyPr rtlCol="0" anchor="ctr"/>
+          <a:lstStyle/>
+          <a:p>
+            <a:pPr algn="ctr"/>
+            <a:endParaRPr lang="da-DK"/>
+          </a:p>
+        </p:txBody>
+      </p:sp>
       <p:pic>
         <p:nvPicPr>
           <p:cNvPr id="9" name="Picture 2" descr="IMADA Fagråd - Studenterforening for IMADA på SDU">
@@ -3966,7 +4020,37 @@
                 <a:latin typeface="Aharoni" panose="02010803020104030203" pitchFamily="2" charset="-79"/>
                 <a:cs typeface="Aharoni" panose="02010803020104030203" pitchFamily="2" charset="-79"/>
               </a:rPr>
-              <a:t>Kontakt os med forslag til dagsordenen på</a:t>
+              <a:t>Contact </a:t>
+            </a:r>
+            <a:r>
+              <a:rPr lang="da-DK" sz="4400" dirty="0" err="1">
+                <a:ln w="0"/>
+                <a:effectLst>
+                  <a:outerShdw blurRad="38100" dist="19050" dir="2700000" algn="tl" rotWithShape="0">
+                    <a:schemeClr val="dk1">
+                      <a:alpha val="40000"/>
+                    </a:schemeClr>
+                  </a:outerShdw>
+                </a:effectLst>
+                <a:latin typeface="Aharoni" panose="02010803020104030203" pitchFamily="2" charset="-79"/>
+                <a:cs typeface="Aharoni" panose="02010803020104030203" pitchFamily="2" charset="-79"/>
+              </a:rPr>
+              <a:t>us</a:t>
+            </a:r>
+            <a:r>
+              <a:rPr lang="da-DK" sz="4400" dirty="0">
+                <a:ln w="0"/>
+                <a:effectLst>
+                  <a:outerShdw blurRad="38100" dist="19050" dir="2700000" algn="tl" rotWithShape="0">
+                    <a:schemeClr val="dk1">
+                      <a:alpha val="40000"/>
+                    </a:schemeClr>
+                  </a:outerShdw>
+                </a:effectLst>
+                <a:latin typeface="Aharoni" panose="02010803020104030203" pitchFamily="2" charset="-79"/>
+                <a:cs typeface="Aharoni" panose="02010803020104030203" pitchFamily="2" charset="-79"/>
+              </a:rPr>
+              <a:t> with suggestions for the agenda at:</a:t>
             </a:r>
             <a:br>
               <a:rPr lang="da-DK" sz="4400" dirty="0">
@@ -4047,7 +4131,7 @@
                   <a:schemeClr val="bg1"/>
                 </a:solidFill>
               </a:rPr>
-              <a:t>GENERALFORSAMLING</a:t>
+              <a:t>GENERAL ASSEMBLY</a:t>
             </a:r>
           </a:p>
           <a:p>
@@ -4058,7 +4142,7 @@
                   <a:schemeClr val="bg1"/>
                 </a:solidFill>
               </a:rPr>
-              <a:t>I IMADA FAGRÅD</a:t>
+              <a:t>IN IMADA FAGRÅD</a:t>
             </a:r>
           </a:p>
         </p:txBody>
@@ -4077,7 +4161,7 @@
         </p:nvSpPr>
         <p:spPr>
           <a:xfrm>
-            <a:off x="169335" y="15463985"/>
+            <a:off x="169335" y="11118843"/>
             <a:ext cx="14814785" cy="1862048"/>
           </a:xfrm>
           <a:prstGeom prst="rect">
@@ -4098,7 +4182,7 @@
                   <a:schemeClr val="bg1"/>
                 </a:solidFill>
               </a:rPr>
-              <a:t>18. Marts KL 17:00 </a:t>
+              <a:t>18. March at 17:00 </a:t>
             </a:r>
             <a:endParaRPr lang="da-DK" sz="8800" b="1" dirty="0">
               <a:solidFill>
@@ -4122,8 +4206,8 @@
         </p:nvSpPr>
         <p:spPr>
           <a:xfrm>
-            <a:off x="152281" y="6192613"/>
-            <a:ext cx="14814785" cy="1446550"/>
+            <a:off x="152281" y="4599656"/>
+            <a:ext cx="14814785" cy="1200329"/>
           </a:xfrm>
           <a:prstGeom prst="rect">
             <a:avLst/>
@@ -4138,14 +4222,14 @@
           <a:p>
             <a:pPr algn="ctr"/>
             <a:r>
-              <a:rPr lang="da-DK" sz="8800" b="1" dirty="0">
+              <a:rPr lang="da-DK" sz="7200" b="1" dirty="0">
                 <a:solidFill>
                   <a:schemeClr val="bg1"/>
                 </a:solidFill>
               </a:rPr>
-              <a:t>DAGSORDEN:</a:t>
-            </a:r>
-            <a:endParaRPr lang="da-DK" sz="7200" b="1" dirty="0">
+              <a:t>AGENDA:</a:t>
+            </a:r>
+            <a:endParaRPr lang="da-DK" sz="6000" b="1" dirty="0">
               <a:solidFill>
                 <a:schemeClr val="bg1"/>
               </a:solidFill>
@@ -4167,7 +4251,263 @@
         </p:nvSpPr>
         <p:spPr>
           <a:xfrm>
-            <a:off x="-1" y="8032668"/>
+            <a:off x="-4" y="5716226"/>
+            <a:ext cx="14814785" cy="830997"/>
+          </a:xfrm>
+          <a:prstGeom prst="rect">
+            <a:avLst/>
+          </a:prstGeom>
+          <a:noFill/>
+        </p:spPr>
+        <p:txBody>
+          <a:bodyPr wrap="square" rtlCol="0">
+            <a:spAutoFit/>
+          </a:bodyPr>
+          <a:lstStyle/>
+          <a:p>
+            <a:pPr algn="ctr"/>
+            <a:r>
+              <a:rPr lang="da-DK" sz="4800" b="1" dirty="0">
+                <a:solidFill>
+                  <a:schemeClr val="bg1"/>
+                </a:solidFill>
+              </a:rPr>
+              <a:t>FAGRÅDS CHAIRMAN STATEMENT</a:t>
+            </a:r>
+          </a:p>
+        </p:txBody>
+      </p:sp>
+      <p:sp>
+        <p:nvSpPr>
+          <p:cNvPr id="6" name="Tekstfelt 62">
+            <a:extLst>
+              <a:ext uri="{FF2B5EF4-FFF2-40B4-BE49-F238E27FC236}">
+                <a16:creationId xmlns:a16="http://schemas.microsoft.com/office/drawing/2014/main" id="{25A034E1-F5B9-A4C7-CC27-773ACA2E883B}"/>
+              </a:ext>
+            </a:extLst>
+          </p:cNvPr>
+          <p:cNvSpPr txBox="1"/>
+          <p:nvPr/>
+        </p:nvSpPr>
+        <p:spPr>
+          <a:xfrm>
+            <a:off x="135230" y="6501056"/>
+            <a:ext cx="14814785" cy="830997"/>
+          </a:xfrm>
+          <a:prstGeom prst="rect">
+            <a:avLst/>
+          </a:prstGeom>
+          <a:noFill/>
+        </p:spPr>
+        <p:txBody>
+          <a:bodyPr wrap="square" rtlCol="0">
+            <a:spAutoFit/>
+          </a:bodyPr>
+          <a:lstStyle/>
+          <a:p>
+            <a:pPr algn="ctr"/>
+            <a:r>
+              <a:rPr lang="da-DK" sz="4800" b="1" dirty="0">
+                <a:solidFill>
+                  <a:schemeClr val="bg1"/>
+                </a:solidFill>
+              </a:rPr>
+              <a:t>FAGRÅDETS FINANCE</a:t>
+            </a:r>
+          </a:p>
+        </p:txBody>
+      </p:sp>
+      <p:sp>
+        <p:nvSpPr>
+          <p:cNvPr id="10" name="Tekstfelt 62">
+            <a:extLst>
+              <a:ext uri="{FF2B5EF4-FFF2-40B4-BE49-F238E27FC236}">
+                <a16:creationId xmlns:a16="http://schemas.microsoft.com/office/drawing/2014/main" id="{A5B92DE0-2BD9-2938-0F2C-28EC5F992E00}"/>
+              </a:ext>
+            </a:extLst>
+          </p:cNvPr>
+          <p:cNvSpPr txBox="1"/>
+          <p:nvPr/>
+        </p:nvSpPr>
+        <p:spPr>
+          <a:xfrm>
+            <a:off x="304564" y="7294010"/>
+            <a:ext cx="14814785" cy="830997"/>
+          </a:xfrm>
+          <a:prstGeom prst="rect">
+            <a:avLst/>
+          </a:prstGeom>
+          <a:noFill/>
+        </p:spPr>
+        <p:txBody>
+          <a:bodyPr wrap="square" rtlCol="0">
+            <a:spAutoFit/>
+          </a:bodyPr>
+          <a:lstStyle/>
+          <a:p>
+            <a:pPr algn="ctr"/>
+            <a:r>
+              <a:rPr lang="da-DK" sz="4800" b="1" dirty="0">
+                <a:solidFill>
+                  <a:schemeClr val="bg1"/>
+                </a:solidFill>
+              </a:rPr>
+              <a:t>CONSIDERATION OF AMENDMENTS</a:t>
+            </a:r>
+          </a:p>
+        </p:txBody>
+      </p:sp>
+      <p:sp>
+        <p:nvSpPr>
+          <p:cNvPr id="11" name="Tekstfelt 62">
+            <a:extLst>
+              <a:ext uri="{FF2B5EF4-FFF2-40B4-BE49-F238E27FC236}">
+                <a16:creationId xmlns:a16="http://schemas.microsoft.com/office/drawing/2014/main" id="{E9CC1538-C545-E566-7261-4252845E9867}"/>
+              </a:ext>
+            </a:extLst>
+          </p:cNvPr>
+          <p:cNvSpPr txBox="1"/>
+          <p:nvPr/>
+        </p:nvSpPr>
+        <p:spPr>
+          <a:xfrm>
+            <a:off x="152280" y="8098547"/>
+            <a:ext cx="14814785" cy="1569660"/>
+          </a:xfrm>
+          <a:prstGeom prst="rect">
+            <a:avLst/>
+          </a:prstGeom>
+          <a:noFill/>
+        </p:spPr>
+        <p:txBody>
+          <a:bodyPr wrap="square" rtlCol="0">
+            <a:spAutoFit/>
+          </a:bodyPr>
+          <a:lstStyle/>
+          <a:p>
+            <a:pPr algn="ctr"/>
+            <a:r>
+              <a:rPr lang="da-DK" sz="4800" b="1" dirty="0">
+                <a:solidFill>
+                  <a:schemeClr val="bg1"/>
+                </a:solidFill>
+              </a:rPr>
+              <a:t>ELECTION OF A NEW BOARD</a:t>
+            </a:r>
+          </a:p>
+          <a:p>
+            <a:pPr algn="ctr"/>
+            <a:endParaRPr lang="da-DK" sz="4800" b="1" dirty="0">
+              <a:solidFill>
+                <a:schemeClr val="bg1"/>
+              </a:solidFill>
+            </a:endParaRPr>
+          </a:p>
+        </p:txBody>
+      </p:sp>
+      <p:sp>
+        <p:nvSpPr>
+          <p:cNvPr id="12" name="Tekstfelt 62">
+            <a:extLst>
+              <a:ext uri="{FF2B5EF4-FFF2-40B4-BE49-F238E27FC236}">
+                <a16:creationId xmlns:a16="http://schemas.microsoft.com/office/drawing/2014/main" id="{19E52698-B359-18C5-0FD3-09211CC88429}"/>
+              </a:ext>
+            </a:extLst>
+          </p:cNvPr>
+          <p:cNvSpPr txBox="1"/>
+          <p:nvPr/>
+        </p:nvSpPr>
+        <p:spPr>
+          <a:xfrm>
+            <a:off x="304560" y="8929544"/>
+            <a:ext cx="14814785" cy="830997"/>
+          </a:xfrm>
+          <a:prstGeom prst="rect">
+            <a:avLst/>
+          </a:prstGeom>
+          <a:noFill/>
+        </p:spPr>
+        <p:txBody>
+          <a:bodyPr wrap="square" rtlCol="0">
+            <a:spAutoFit/>
+          </a:bodyPr>
+          <a:lstStyle/>
+          <a:p>
+            <a:pPr algn="ctr"/>
+            <a:r>
+              <a:rPr lang="da-DK" sz="4800" b="1" dirty="0">
+                <a:solidFill>
+                  <a:schemeClr val="bg1"/>
+                </a:solidFill>
+              </a:rPr>
+              <a:t>ELECTTION OF INTERNAL AUDITORS</a:t>
+            </a:r>
+          </a:p>
+        </p:txBody>
+      </p:sp>
+      <p:sp>
+        <p:nvSpPr>
+          <p:cNvPr id="13" name="Tekstfelt 62">
+            <a:extLst>
+              <a:ext uri="{FF2B5EF4-FFF2-40B4-BE49-F238E27FC236}">
+                <a16:creationId xmlns:a16="http://schemas.microsoft.com/office/drawing/2014/main" id="{3BCDFFEC-C527-1595-9432-D9F15EF4844A}"/>
+              </a:ext>
+            </a:extLst>
+          </p:cNvPr>
+          <p:cNvSpPr txBox="1"/>
+          <p:nvPr/>
+        </p:nvSpPr>
+        <p:spPr>
+          <a:xfrm>
+            <a:off x="456840" y="9734081"/>
+            <a:ext cx="14814785" cy="1569660"/>
+          </a:xfrm>
+          <a:prstGeom prst="rect">
+            <a:avLst/>
+          </a:prstGeom>
+          <a:noFill/>
+        </p:spPr>
+        <p:txBody>
+          <a:bodyPr wrap="square" rtlCol="0">
+            <a:spAutoFit/>
+          </a:bodyPr>
+          <a:lstStyle/>
+          <a:p>
+            <a:pPr algn="ctr"/>
+            <a:r>
+              <a:rPr lang="da-DK" sz="4800" b="1" dirty="0">
+                <a:solidFill>
+                  <a:schemeClr val="bg1"/>
+                </a:solidFill>
+              </a:rPr>
+              <a:t>ANY OTHER BUSINESS</a:t>
+            </a:r>
+          </a:p>
+          <a:p>
+            <a:pPr algn="ctr"/>
+            <a:endParaRPr lang="da-DK" sz="4800" b="1" dirty="0">
+              <a:solidFill>
+                <a:schemeClr val="bg1"/>
+              </a:solidFill>
+            </a:endParaRPr>
+          </a:p>
+        </p:txBody>
+      </p:sp>
+      <p:sp>
+        <p:nvSpPr>
+          <p:cNvPr id="14" name="Tekstfelt 62">
+            <a:extLst>
+              <a:ext uri="{FF2B5EF4-FFF2-40B4-BE49-F238E27FC236}">
+                <a16:creationId xmlns:a16="http://schemas.microsoft.com/office/drawing/2014/main" id="{8B7062E1-2C4F-4A6C-CCF0-BA76DFD066C9}"/>
+              </a:ext>
+            </a:extLst>
+          </p:cNvPr>
+          <p:cNvSpPr txBox="1"/>
+          <p:nvPr/>
+        </p:nvSpPr>
+        <p:spPr>
+          <a:xfrm>
+            <a:off x="135230" y="12837194"/>
             <a:ext cx="14814785" cy="1015663"/>
           </a:xfrm>
           <a:prstGeom prst="rect">
@@ -4188,17 +4528,108 @@
                   <a:schemeClr val="bg1"/>
                 </a:solidFill>
               </a:rPr>
-              <a:t>FAGRÅDSLEDERENS BERETNING</a:t>
-            </a:r>
-          </a:p>
-        </p:txBody>
-      </p:sp>
-      <p:sp>
-        <p:nvSpPr>
-          <p:cNvPr id="6" name="Tekstfelt 62">
-            <a:extLst>
-              <a:ext uri="{FF2B5EF4-FFF2-40B4-BE49-F238E27FC236}">
-                <a16:creationId xmlns:a16="http://schemas.microsoft.com/office/drawing/2014/main" id="{25A034E1-F5B9-A4C7-CC27-773ACA2E883B}"/>
+              <a:t>IMADAS CONFERENCE ROOM</a:t>
+            </a:r>
+          </a:p>
+        </p:txBody>
+      </p:sp>
+      <p:pic>
+        <p:nvPicPr>
+          <p:cNvPr id="16" name="Billede 15">
+            <a:extLst>
+              <a:ext uri="{FF2B5EF4-FFF2-40B4-BE49-F238E27FC236}">
+                <a16:creationId xmlns:a16="http://schemas.microsoft.com/office/drawing/2014/main" id="{E270480C-E455-EDE3-8411-B1838699EE53}"/>
+              </a:ext>
+            </a:extLst>
+          </p:cNvPr>
+          <p:cNvPicPr>
+            <a:picLocks noChangeAspect="1"/>
+          </p:cNvPicPr>
+          <p:nvPr/>
+        </p:nvPicPr>
+        <p:blipFill>
+          <a:blip r:embed="rId6"/>
+          <a:stretch>
+            <a:fillRect/>
+          </a:stretch>
+        </p:blipFill>
+        <p:spPr>
+          <a:xfrm>
+            <a:off x="10831925" y="14383880"/>
+            <a:ext cx="3087928" cy="3600572"/>
+          </a:xfrm>
+          <a:prstGeom prst="rect">
+            <a:avLst/>
+          </a:prstGeom>
+        </p:spPr>
+      </p:pic>
+      <p:pic>
+        <p:nvPicPr>
+          <p:cNvPr id="1026" name="Picture 2" descr="Pizza slice png Images - Free Download on Freepik">
+            <a:extLst>
+              <a:ext uri="{FF2B5EF4-FFF2-40B4-BE49-F238E27FC236}">
+                <a16:creationId xmlns:a16="http://schemas.microsoft.com/office/drawing/2014/main" id="{86CE04D2-D73C-32A7-3404-CEA0CA480186}"/>
+              </a:ext>
+            </a:extLst>
+          </p:cNvPr>
+          <p:cNvPicPr>
+            <a:picLocks noChangeAspect="1" noChangeArrowheads="1"/>
+          </p:cNvPicPr>
+          <p:nvPr/>
+        </p:nvPicPr>
+        <p:blipFill>
+          <a:blip r:embed="rId7">
+            <a:extLst>
+              <a:ext uri="{BEBA8EAE-BF5A-486C-A8C5-ECC9F3942E4B}">
+                <a14:imgProps xmlns:a14="http://schemas.microsoft.com/office/drawing/2010/main">
+                  <a14:imgLayer r:embed="rId8">
+                    <a14:imgEffect>
+                      <a14:backgroundRemoval t="8514" b="95135" l="10000" r="90000">
+                        <a14:foregroundMark x1="39189" y1="11351" x2="26486" y2="8514"/>
+                        <a14:foregroundMark x1="26486" y1="8514" x2="25000" y2="9595"/>
+                        <a14:foregroundMark x1="28784" y1="89865" x2="28784" y2="95135"/>
+                        <a14:foregroundMark x1="28784" y1="95135" x2="28784" y2="95135"/>
+                      </a14:backgroundRemoval>
+                    </a14:imgEffect>
+                  </a14:imgLayer>
+                </a14:imgProps>
+              </a:ext>
+              <a:ext uri="{28A0092B-C50C-407E-A947-70E740481C1C}">
+                <a14:useLocalDpi xmlns:a14="http://schemas.microsoft.com/office/drawing/2010/main" val="0"/>
+              </a:ext>
+            </a:extLst>
+          </a:blip>
+          <a:srcRect/>
+          <a:stretch>
+            <a:fillRect/>
+          </a:stretch>
+        </p:blipFill>
+        <p:spPr bwMode="auto">
+          <a:xfrm rot="17100000">
+            <a:off x="1622103" y="14081534"/>
+            <a:ext cx="3760760" cy="3760760"/>
+          </a:xfrm>
+          <a:prstGeom prst="rect">
+            <a:avLst/>
+          </a:prstGeom>
+          <a:noFill/>
+          <a:extLst>
+            <a:ext uri="{909E8E84-426E-40DD-AFC4-6F175D3DCCD1}">
+              <a14:hiddenFill xmlns:a14="http://schemas.microsoft.com/office/drawing/2010/main">
+                <a:solidFill>
+                  <a:srgbClr val="FFFFFF"/>
+                </a:solidFill>
+              </a14:hiddenFill>
+            </a:ext>
+          </a:extLst>
+        </p:spPr>
+      </p:pic>
+      <p:sp>
+        <p:nvSpPr>
+          <p:cNvPr id="18" name="Tekstfelt 62">
+            <a:extLst>
+              <a:ext uri="{FF2B5EF4-FFF2-40B4-BE49-F238E27FC236}">
+                <a16:creationId xmlns:a16="http://schemas.microsoft.com/office/drawing/2014/main" id="{C6EF052B-2745-BCBB-6F11-D23970AB87AA}"/>
               </a:ext>
             </a:extLst>
           </p:cNvPr>
@@ -4207,8 +4638,8 @@
         </p:nvSpPr>
         <p:spPr>
           <a:xfrm>
-            <a:off x="0" y="9364892"/>
-            <a:ext cx="14814785" cy="1015663"/>
+            <a:off x="456840" y="14434685"/>
+            <a:ext cx="14814785" cy="2308324"/>
           </a:xfrm>
           <a:prstGeom prst="rect">
             <a:avLst/>
@@ -4223,216 +4654,150 @@
           <a:p>
             <a:pPr algn="ctr"/>
             <a:r>
-              <a:rPr lang="da-DK" sz="6000" b="1" dirty="0">
+              <a:rPr lang="da-DK" sz="4800" b="1" dirty="0">
                 <a:solidFill>
                   <a:schemeClr val="bg1"/>
                 </a:solidFill>
               </a:rPr>
-              <a:t>FAGRÅDETS ØKONOMI</a:t>
-            </a:r>
-          </a:p>
-        </p:txBody>
-      </p:sp>
-      <p:sp>
-        <p:nvSpPr>
-          <p:cNvPr id="10" name="Tekstfelt 62">
-            <a:extLst>
-              <a:ext uri="{FF2B5EF4-FFF2-40B4-BE49-F238E27FC236}">
-                <a16:creationId xmlns:a16="http://schemas.microsoft.com/office/drawing/2014/main" id="{A5B92DE0-2BD9-2938-0F2C-28EC5F992E00}"/>
-              </a:ext>
-            </a:extLst>
-          </p:cNvPr>
-          <p:cNvSpPr txBox="1"/>
-          <p:nvPr/>
-        </p:nvSpPr>
-        <p:spPr>
-          <a:xfrm>
-            <a:off x="182878" y="10577141"/>
-            <a:ext cx="14814785" cy="1015663"/>
-          </a:xfrm>
-          <a:prstGeom prst="rect">
-            <a:avLst/>
-          </a:prstGeom>
-          <a:noFill/>
-        </p:spPr>
-        <p:txBody>
-          <a:bodyPr wrap="square" rtlCol="0">
-            <a:spAutoFit/>
-          </a:bodyPr>
-          <a:lstStyle/>
-          <a:p>
-            <a:pPr algn="ctr"/>
-            <a:r>
-              <a:rPr lang="da-DK" sz="6000" b="1" dirty="0">
+              <a:t>FREE PIZZA</a:t>
+            </a:r>
+            <a:br>
+              <a:rPr lang="da-DK" sz="4800" b="1" dirty="0">
                 <a:solidFill>
                   <a:schemeClr val="bg1"/>
                 </a:solidFill>
               </a:rPr>
-              <a:t>BEHANDLING AF VEDTÆGTSÆNDRINGER</a:t>
-            </a:r>
-          </a:p>
-        </p:txBody>
-      </p:sp>
-      <p:sp>
-        <p:nvSpPr>
-          <p:cNvPr id="11" name="Tekstfelt 62">
-            <a:extLst>
-              <a:ext uri="{FF2B5EF4-FFF2-40B4-BE49-F238E27FC236}">
-                <a16:creationId xmlns:a16="http://schemas.microsoft.com/office/drawing/2014/main" id="{E9CC1538-C545-E566-7261-4252845E9867}"/>
-              </a:ext>
-            </a:extLst>
-          </p:cNvPr>
-          <p:cNvSpPr txBox="1"/>
-          <p:nvPr/>
-        </p:nvSpPr>
-        <p:spPr>
-          <a:xfrm>
-            <a:off x="182878" y="11825423"/>
-            <a:ext cx="14814785" cy="1015663"/>
-          </a:xfrm>
-          <a:prstGeom prst="rect">
-            <a:avLst/>
-          </a:prstGeom>
-          <a:noFill/>
-        </p:spPr>
-        <p:txBody>
-          <a:bodyPr wrap="square" rtlCol="0">
-            <a:spAutoFit/>
-          </a:bodyPr>
-          <a:lstStyle/>
-          <a:p>
-            <a:pPr algn="ctr"/>
-            <a:r>
-              <a:rPr lang="da-DK" sz="6000" b="1" dirty="0">
+            </a:br>
+            <a:r>
+              <a:rPr lang="da-DK" sz="4800" b="1" dirty="0">
                 <a:solidFill>
                   <a:schemeClr val="bg1"/>
                 </a:solidFill>
               </a:rPr>
-              <a:t>VALG AF NY BESTYRELSE</a:t>
-            </a:r>
-          </a:p>
-        </p:txBody>
-      </p:sp>
-      <p:sp>
-        <p:nvSpPr>
-          <p:cNvPr id="12" name="Tekstfelt 62">
-            <a:extLst>
-              <a:ext uri="{FF2B5EF4-FFF2-40B4-BE49-F238E27FC236}">
-                <a16:creationId xmlns:a16="http://schemas.microsoft.com/office/drawing/2014/main" id="{19E52698-B359-18C5-0FD3-09211CC88429}"/>
-              </a:ext>
-            </a:extLst>
-          </p:cNvPr>
-          <p:cNvSpPr txBox="1"/>
-          <p:nvPr/>
-        </p:nvSpPr>
-        <p:spPr>
-          <a:xfrm>
-            <a:off x="152280" y="13070375"/>
-            <a:ext cx="14814785" cy="1015663"/>
-          </a:xfrm>
-          <a:prstGeom prst="rect">
-            <a:avLst/>
-          </a:prstGeom>
-          <a:noFill/>
-        </p:spPr>
-        <p:txBody>
-          <a:bodyPr wrap="square" rtlCol="0">
-            <a:spAutoFit/>
-          </a:bodyPr>
-          <a:lstStyle/>
-          <a:p>
-            <a:pPr algn="ctr"/>
-            <a:r>
-              <a:rPr lang="da-DK" sz="6000" b="1" dirty="0">
+              <a:t>for </a:t>
+            </a:r>
+            <a:r>
+              <a:rPr lang="da-DK" sz="4800" b="1" dirty="0" err="1">
                 <a:solidFill>
                   <a:schemeClr val="bg1"/>
                 </a:solidFill>
               </a:rPr>
-              <a:t>VALG AF INTERNE REVISORER</a:t>
-            </a:r>
-          </a:p>
-        </p:txBody>
-      </p:sp>
-      <p:sp>
-        <p:nvSpPr>
-          <p:cNvPr id="13" name="Tekstfelt 62">
-            <a:extLst>
-              <a:ext uri="{FF2B5EF4-FFF2-40B4-BE49-F238E27FC236}">
-                <a16:creationId xmlns:a16="http://schemas.microsoft.com/office/drawing/2014/main" id="{3BCDFFEC-C527-1595-9432-D9F15EF4844A}"/>
-              </a:ext>
-            </a:extLst>
-          </p:cNvPr>
-          <p:cNvSpPr txBox="1"/>
-          <p:nvPr/>
-        </p:nvSpPr>
-        <p:spPr>
-          <a:xfrm>
-            <a:off x="304565" y="14290411"/>
-            <a:ext cx="14814785" cy="1015663"/>
-          </a:xfrm>
-          <a:prstGeom prst="rect">
-            <a:avLst/>
-          </a:prstGeom>
-          <a:noFill/>
-        </p:spPr>
-        <p:txBody>
-          <a:bodyPr wrap="square" rtlCol="0">
-            <a:spAutoFit/>
-          </a:bodyPr>
-          <a:lstStyle/>
-          <a:p>
-            <a:pPr algn="ctr"/>
-            <a:r>
-              <a:rPr lang="da-DK" sz="6000" b="1" dirty="0">
+              <a:t>those</a:t>
+            </a:r>
+            <a:r>
+              <a:rPr lang="da-DK" sz="4800" b="1" dirty="0">
                 <a:solidFill>
                   <a:schemeClr val="bg1"/>
                 </a:solidFill>
               </a:rPr>
-              <a:t>EVENENTUELT</a:t>
-            </a:r>
-          </a:p>
-        </p:txBody>
-      </p:sp>
-      <p:sp>
-        <p:nvSpPr>
-          <p:cNvPr id="14" name="Tekstfelt 62">
-            <a:extLst>
-              <a:ext uri="{FF2B5EF4-FFF2-40B4-BE49-F238E27FC236}">
-                <a16:creationId xmlns:a16="http://schemas.microsoft.com/office/drawing/2014/main" id="{8B7062E1-2C4F-4A6C-CCF0-BA76DFD066C9}"/>
-              </a:ext>
-            </a:extLst>
-          </p:cNvPr>
-          <p:cNvSpPr txBox="1"/>
-          <p:nvPr/>
-        </p:nvSpPr>
-        <p:spPr>
-          <a:xfrm>
-            <a:off x="135230" y="17182336"/>
-            <a:ext cx="14814785" cy="1015663"/>
-          </a:xfrm>
-          <a:prstGeom prst="rect">
-            <a:avLst/>
-          </a:prstGeom>
-          <a:noFill/>
-        </p:spPr>
-        <p:txBody>
-          <a:bodyPr wrap="square" rtlCol="0">
-            <a:spAutoFit/>
-          </a:bodyPr>
-          <a:lstStyle/>
-          <a:p>
-            <a:pPr algn="ctr"/>
-            <a:r>
-              <a:rPr lang="da-DK" sz="6000" b="1" dirty="0">
+              <a:t> </a:t>
+            </a:r>
+            <a:r>
+              <a:rPr lang="da-DK" sz="4800" b="1" dirty="0" err="1">
                 <a:solidFill>
                   <a:schemeClr val="bg1"/>
                 </a:solidFill>
               </a:rPr>
-              <a:t>IMADAS KONFERENCELOKALE</a:t>
-            </a:r>
-          </a:p>
-        </p:txBody>
-      </p:sp>
+              <a:t>who</a:t>
+            </a:r>
+            <a:endParaRPr lang="da-DK" sz="4800" b="1" dirty="0">
+              <a:solidFill>
+                <a:schemeClr val="bg1"/>
+              </a:solidFill>
+            </a:endParaRPr>
+          </a:p>
+          <a:p>
+            <a:pPr algn="ctr"/>
+            <a:r>
+              <a:rPr lang="da-DK" sz="4800" b="1" dirty="0" err="1">
+                <a:solidFill>
+                  <a:schemeClr val="bg1"/>
+                </a:solidFill>
+              </a:rPr>
+              <a:t>click</a:t>
+            </a:r>
+            <a:r>
+              <a:rPr lang="da-DK" sz="4800" b="1" dirty="0">
+                <a:solidFill>
+                  <a:schemeClr val="bg1"/>
+                </a:solidFill>
+              </a:rPr>
+              <a:t> </a:t>
+            </a:r>
+            <a:r>
+              <a:rPr lang="da-DK" sz="4800" b="1" dirty="0" err="1">
+                <a:solidFill>
+                  <a:schemeClr val="bg1"/>
+                </a:solidFill>
+              </a:rPr>
+              <a:t>going</a:t>
+            </a:r>
+            <a:r>
+              <a:rPr lang="da-DK" sz="4800" b="1" dirty="0">
+                <a:solidFill>
+                  <a:schemeClr val="bg1"/>
+                </a:solidFill>
+              </a:rPr>
+              <a:t> of </a:t>
+            </a:r>
+            <a:r>
+              <a:rPr lang="da-DK" sz="4800" b="1" dirty="0" err="1">
+                <a:solidFill>
+                  <a:schemeClr val="bg1"/>
+                </a:solidFill>
+              </a:rPr>
+              <a:t>fb</a:t>
+            </a:r>
+            <a:endParaRPr lang="da-DK" sz="4800" b="1" dirty="0">
+              <a:solidFill>
+                <a:schemeClr val="bg1"/>
+              </a:solidFill>
+            </a:endParaRPr>
+          </a:p>
+        </p:txBody>
+      </p:sp>
+      <p:cxnSp>
+        <p:nvCxnSpPr>
+          <p:cNvPr id="22" name="Lige pilforbindelse 21">
+            <a:extLst>
+              <a:ext uri="{FF2B5EF4-FFF2-40B4-BE49-F238E27FC236}">
+                <a16:creationId xmlns:a16="http://schemas.microsoft.com/office/drawing/2014/main" id="{B36D775F-CA5E-76E9-03F6-35DF194A7D6F}"/>
+              </a:ext>
+            </a:extLst>
+          </p:cNvPr>
+          <p:cNvCxnSpPr/>
+          <p:nvPr/>
+        </p:nvCxnSpPr>
+        <p:spPr>
+          <a:xfrm>
+            <a:off x="5805469" y="17318182"/>
+            <a:ext cx="3615622" cy="0"/>
+          </a:xfrm>
+          <a:prstGeom prst="straightConnector1">
+            <a:avLst/>
+          </a:prstGeom>
+          <a:ln w="228600">
+            <a:solidFill>
+              <a:schemeClr val="bg1"/>
+            </a:solidFill>
+            <a:tailEnd type="triangle"/>
+          </a:ln>
+        </p:spPr>
+        <p:style>
+          <a:lnRef idx="2">
+            <a:schemeClr val="accent1"/>
+          </a:lnRef>
+          <a:fillRef idx="0">
+            <a:schemeClr val="accent1"/>
+          </a:fillRef>
+          <a:effectRef idx="1">
+            <a:schemeClr val="accent1"/>
+          </a:effectRef>
+          <a:fontRef idx="minor">
+            <a:schemeClr val="tx1"/>
+          </a:fontRef>
+        </p:style>
+      </p:cxnSp>
     </p:spTree>
     <p:extLst>
       <p:ext uri="{BB962C8B-B14F-4D97-AF65-F5344CB8AC3E}">
